--- a/EDA/Modeling-Elements/talk-slides/modeling-elements-invited-talk.pptx
+++ b/EDA/Modeling-Elements/talk-slides/modeling-elements-invited-talk.pptx
@@ -4102,149 +4102,30 @@
           </a:p>
         </p:txBody>
       </p:sp>
-      <p:sp>
-        <p:nvSpPr>
-          <p:cNvPr id="9" name="TextBox 8"/>
-          <p:cNvSpPr txBox="1"/>
+      <p:pic>
+        <p:nvPicPr>
+          <p:cNvPr id="9" name="Picture 8" descr="sch-data.png"/>
+          <p:cNvPicPr>
+            <a:picLocks noChangeAspect="1"/>
+          </p:cNvPicPr>
           <p:nvPr/>
-        </p:nvSpPr>
-        <p:spPr>
-          <a:xfrm>
-            <a:off x="457200" y="3200400"/>
-            <a:ext cx="3630168" cy="2377440"/>
+        </p:nvPicPr>
+        <p:blipFill>
+          <a:blip r:embed="rId2"/>
+          <a:stretch>
+            <a:fillRect/>
+          </a:stretch>
+        </p:blipFill>
+        <p:spPr>
+          <a:xfrm>
+            <a:off x="484632" y="3108960"/>
+            <a:ext cx="3566160" cy="2468880"/>
           </a:xfrm>
           <a:prstGeom prst="rect">
             <a:avLst/>
           </a:prstGeom>
-          <a:noFill/>
-        </p:spPr>
-        <p:txBody>
-          <a:bodyPr wrap="square" anchor="t">
-            <a:spAutoFit/>
-          </a:bodyPr>
-          <a:lstStyle/>
-          <a:p>
-            <a:pPr algn="l">
-              <a:spcAft>
-                <a:spcPts val="800"/>
-              </a:spcAft>
-            </a:pPr>
-            <a:r>
-              <a:rPr sz="1500" b="0">
-                <a:solidFill>
-                  <a:srgbClr val="555B66"/>
-                </a:solidFill>
-                <a:latin typeface="Calibri"/>
-              </a:rPr>
-              <a:t>P(X</a:t>
-            </a:r>
-            <a:r>
-              <a:rPr sz="1500" b="0" baseline="-25000">
-                <a:solidFill>
-                  <a:srgbClr val="555B66"/>
-                </a:solidFill>
-                <a:latin typeface="Calibri"/>
-              </a:rPr>
-              <a:t>o</a:t>
-            </a:r>
-            <a:r>
-              <a:rPr sz="1500" b="0">
-                <a:solidFill>
-                  <a:srgbClr val="555B66"/>
-                </a:solidFill>
-                <a:latin typeface="Calibri"/>
-              </a:rPr>
-              <a:t>)</a:t>
-            </a:r>
-            <a:r>
-              <a:rPr sz="1500" b="0" baseline="-25000">
-                <a:solidFill>
-                  <a:srgbClr val="555B66"/>
-                </a:solidFill>
-                <a:latin typeface="Calibri"/>
-              </a:rPr>
-              <a:t>true</a:t>
-            </a:r>
-            <a:r>
-              <a:rPr sz="1500" b="0">
-                <a:solidFill>
-                  <a:srgbClr val="555B66"/>
-                </a:solidFill>
-                <a:latin typeface="Calibri"/>
-              </a:rPr>
-              <a:t> is how inference data is actually distributed.</a:t>
-            </a:r>
-          </a:p>
-          <a:p>
-            <a:pPr algn="l">
-              <a:spcAft>
-                <a:spcPts val="800"/>
-              </a:spcAft>
-            </a:pPr>
-            <a:r>
-              <a:rPr sz="1500" b="0">
-                <a:solidFill>
-                  <a:srgbClr val="555B66"/>
-                </a:solidFill>
-                <a:latin typeface="Calibri"/>
-              </a:rPr>
-              <a:t>P(X</a:t>
-            </a:r>
-            <a:r>
-              <a:rPr sz="1500" b="0" baseline="-25000">
-                <a:solidFill>
-                  <a:srgbClr val="555B66"/>
-                </a:solidFill>
-                <a:latin typeface="Calibri"/>
-              </a:rPr>
-              <a:t>i</a:t>
-            </a:r>
-            <a:r>
-              <a:rPr sz="1500" b="0">
-                <a:solidFill>
-                  <a:srgbClr val="555B66"/>
-                </a:solidFill>
-                <a:latin typeface="Calibri"/>
-              </a:rPr>
-              <a:t>) must cover P(X</a:t>
-            </a:r>
-            <a:r>
-              <a:rPr sz="1500" b="0" baseline="-25000">
-                <a:solidFill>
-                  <a:srgbClr val="555B66"/>
-                </a:solidFill>
-                <a:latin typeface="Calibri"/>
-              </a:rPr>
-              <a:t>o</a:t>
-            </a:r>
-            <a:r>
-              <a:rPr sz="1500" b="0">
-                <a:solidFill>
-                  <a:srgbClr val="555B66"/>
-                </a:solidFill>
-                <a:latin typeface="Calibri"/>
-              </a:rPr>
-              <a:t>).</a:t>
-            </a:r>
-          </a:p>
-          <a:p>
-            <a:pPr algn="l">
-              <a:spcAft>
-                <a:spcPts val="800"/>
-              </a:spcAft>
-            </a:pPr>
-            <a:r>
-              <a:rPr sz="1500" b="1">
-                <a:solidFill>
-                  <a:srgbClr val="2E75B6"/>
-                </a:solidFill>
-                <a:latin typeface="Calibri"/>
-              </a:rPr>
-              <a:t>Departure → covariate shift</a:t>
-            </a:r>
-          </a:p>
-        </p:txBody>
-      </p:sp>
+        </p:spPr>
+      </p:pic>
       <p:sp>
         <p:nvSpPr>
           <p:cNvPr id="10" name="Rectangle 9"/>
@@ -4324,113 +4205,30 @@
           </a:p>
         </p:txBody>
       </p:sp>
-      <p:sp>
-        <p:nvSpPr>
-          <p:cNvPr id="12" name="TextBox 11"/>
-          <p:cNvSpPr txBox="1"/>
+      <p:pic>
+        <p:nvPicPr>
+          <p:cNvPr id="12" name="Picture 11" descr="sch-model.png"/>
+          <p:cNvPicPr>
+            <a:picLocks noChangeAspect="1"/>
+          </p:cNvPicPr>
           <p:nvPr/>
-        </p:nvSpPr>
-        <p:spPr>
-          <a:xfrm>
-            <a:off x="4279392" y="3200400"/>
-            <a:ext cx="3630168" cy="2377440"/>
+        </p:nvPicPr>
+        <p:blipFill>
+          <a:blip r:embed="rId3"/>
+          <a:stretch>
+            <a:fillRect/>
+          </a:stretch>
+        </p:blipFill>
+        <p:spPr>
+          <a:xfrm>
+            <a:off x="4306824" y="3108960"/>
+            <a:ext cx="3566160" cy="2468880"/>
           </a:xfrm>
           <a:prstGeom prst="rect">
             <a:avLst/>
           </a:prstGeom>
-          <a:noFill/>
-        </p:spPr>
-        <p:txBody>
-          <a:bodyPr wrap="square" anchor="t">
-            <a:spAutoFit/>
-          </a:bodyPr>
-          <a:lstStyle/>
-          <a:p>
-            <a:pPr algn="l">
-              <a:spcAft>
-                <a:spcPts val="800"/>
-              </a:spcAft>
-            </a:pPr>
-            <a:r>
-              <a:rPr sz="1500" b="0">
-                <a:solidFill>
-                  <a:srgbClr val="555B66"/>
-                </a:solidFill>
-                <a:latin typeface="Calibri"/>
-              </a:rPr>
-              <a:t>P(Y|X)</a:t>
-            </a:r>
-            <a:r>
-              <a:rPr sz="1500" b="0" baseline="-25000">
-                <a:solidFill>
-                  <a:srgbClr val="555B66"/>
-                </a:solidFill>
-                <a:latin typeface="Calibri"/>
-              </a:rPr>
-              <a:t>model</a:t>
-            </a:r>
-            <a:r>
-              <a:rPr sz="1500" b="0">
-                <a:solidFill>
-                  <a:srgbClr val="555B66"/>
-                </a:solidFill>
-                <a:latin typeface="Calibri"/>
-              </a:rPr>
-              <a:t> is the relation learned from X</a:t>
-            </a:r>
-            <a:r>
-              <a:rPr sz="1500" b="0" baseline="-25000">
-                <a:solidFill>
-                  <a:srgbClr val="555B66"/>
-                </a:solidFill>
-                <a:latin typeface="Calibri"/>
-              </a:rPr>
-              <a:t>i</a:t>
-            </a:r>
-            <a:r>
-              <a:rPr sz="1500" b="0">
-                <a:solidFill>
-                  <a:srgbClr val="555B66"/>
-                </a:solidFill>
-                <a:latin typeface="Calibri"/>
-              </a:rPr>
-              <a:t>.</a:t>
-            </a:r>
-          </a:p>
-          <a:p>
-            <a:pPr algn="l">
-              <a:spcAft>
-                <a:spcPts val="800"/>
-              </a:spcAft>
-            </a:pPr>
-            <a:r>
-              <a:rPr sz="1500" b="0">
-                <a:solidFill>
-                  <a:srgbClr val="555B66"/>
-                </a:solidFill>
-                <a:latin typeface="Calibri"/>
-              </a:rPr>
-              <a:t>It must stay close to the true P(Y|X).</a:t>
-            </a:r>
-          </a:p>
-          <a:p>
-            <a:pPr algn="l">
-              <a:spcAft>
-                <a:spcPts val="800"/>
-              </a:spcAft>
-            </a:pPr>
-            <a:r>
-              <a:rPr sz="1500" b="1">
-                <a:solidFill>
-                  <a:srgbClr val="C55A11"/>
-                </a:solidFill>
-                <a:latin typeface="Calibri"/>
-              </a:rPr>
-              <a:t>Change after training → concept drift</a:t>
-            </a:r>
-          </a:p>
-        </p:txBody>
-      </p:sp>
+        </p:spPr>
+      </p:pic>
       <p:sp>
         <p:nvSpPr>
           <p:cNvPr id="13" name="Rectangle 12"/>
@@ -4510,95 +4308,30 @@
           </a:p>
         </p:txBody>
       </p:sp>
-      <p:sp>
-        <p:nvSpPr>
-          <p:cNvPr id="15" name="TextBox 14"/>
-          <p:cNvSpPr txBox="1"/>
+      <p:pic>
+        <p:nvPicPr>
+          <p:cNvPr id="15" name="Picture 14" descr="sch-prediction.png"/>
+          <p:cNvPicPr>
+            <a:picLocks noChangeAspect="1"/>
+          </p:cNvPicPr>
           <p:nvPr/>
-        </p:nvSpPr>
-        <p:spPr>
-          <a:xfrm>
-            <a:off x="8101583" y="3200400"/>
-            <a:ext cx="3630168" cy="2377440"/>
+        </p:nvPicPr>
+        <p:blipFill>
+          <a:blip r:embed="rId4"/>
+          <a:stretch>
+            <a:fillRect/>
+          </a:stretch>
+        </p:blipFill>
+        <p:spPr>
+          <a:xfrm>
+            <a:off x="8129015" y="3108960"/>
+            <a:ext cx="3566160" cy="2468880"/>
           </a:xfrm>
           <a:prstGeom prst="rect">
             <a:avLst/>
           </a:prstGeom>
-          <a:noFill/>
-        </p:spPr>
-        <p:txBody>
-          <a:bodyPr wrap="square" anchor="t">
-            <a:spAutoFit/>
-          </a:bodyPr>
-          <a:lstStyle/>
-          <a:p>
-            <a:pPr algn="l">
-              <a:spcAft>
-                <a:spcPts val="800"/>
-              </a:spcAft>
-            </a:pPr>
-            <a:r>
-              <a:rPr sz="1500" b="0">
-                <a:solidFill>
-                  <a:srgbClr val="555B66"/>
-                </a:solidFill>
-                <a:latin typeface="Calibri"/>
-              </a:rPr>
-              <a:t>P(Y)</a:t>
-            </a:r>
-            <a:r>
-              <a:rPr sz="1500" b="0" baseline="-25000">
-                <a:solidFill>
-                  <a:srgbClr val="555B66"/>
-                </a:solidFill>
-                <a:latin typeface="Calibri"/>
-              </a:rPr>
-              <a:t>pred</a:t>
-            </a:r>
-            <a:r>
-              <a:rPr sz="1500" b="0">
-                <a:solidFill>
-                  <a:srgbClr val="555B66"/>
-                </a:solidFill>
-                <a:latin typeface="Calibri"/>
-              </a:rPr>
-              <a:t> averages predictions, weighted by how likely each x is at inference.</a:t>
-            </a:r>
-          </a:p>
-          <a:p>
-            <a:pPr algn="l">
-              <a:spcAft>
-                <a:spcPts val="800"/>
-              </a:spcAft>
-            </a:pPr>
-            <a:r>
-              <a:rPr sz="1500" b="0">
-                <a:solidFill>
-                  <a:srgbClr val="555B66"/>
-                </a:solidFill>
-                <a:latin typeface="Calibri"/>
-              </a:rPr>
-              <a:t>If either factor is off, it departs from the true P(Y).</a:t>
-            </a:r>
-          </a:p>
-          <a:p>
-            <a:pPr algn="l">
-              <a:spcAft>
-                <a:spcPts val="800"/>
-              </a:spcAft>
-            </a:pPr>
-            <a:r>
-              <a:rPr sz="1500" b="1">
-                <a:solidFill>
-                  <a:srgbClr val="388E3C"/>
-                </a:solidFill>
-                <a:latin typeface="Calibri"/>
-              </a:rPr>
-              <a:t>Shift in P(Y) → prior shift</a:t>
-            </a:r>
-          </a:p>
-        </p:txBody>
-      </p:sp>
+        </p:spPr>
+      </p:pic>
       <p:sp>
         <p:nvSpPr>
           <p:cNvPr id="16" name="Rectangle 15"/>

--- a/EDA/Modeling-Elements/talk-slides/modeling-elements-invited-talk.pptx
+++ b/EDA/Modeling-Elements/talk-slides/modeling-elements-invited-talk.pptx
@@ -3955,7 +3955,25 @@
                 </a:solidFill>
                 <a:latin typeface="Calibri"/>
               </a:rPr>
-              <a:t>P(Y | X=x)</a:t>
+              <a:t>P(Y | X=x; X</a:t>
+            </a:r>
+            <a:r>
+              <a:rPr sz="2400" b="1" baseline="-25000">
+                <a:solidFill>
+                  <a:srgbClr val="C55A11"/>
+                </a:solidFill>
+                <a:latin typeface="Calibri"/>
+              </a:rPr>
+              <a:t>i</a:t>
+            </a:r>
+            <a:r>
+              <a:rPr sz="2400" b="1">
+                <a:solidFill>
+                  <a:srgbClr val="C55A11"/>
+                </a:solidFill>
+                <a:latin typeface="Calibri"/>
+              </a:rPr>
+              <a:t>)</a:t>
             </a:r>
             <a:r>
               <a:rPr sz="2400" b="1" baseline="-25000">

--- a/EDA/Modeling-Elements/talk-slides/modeling-elements-invited-talk.pptx
+++ b/EDA/Modeling-Elements/talk-slides/modeling-elements-invited-talk.pptx
@@ -3346,7 +3346,7 @@
                 </a:solidFill>
                 <a:latin typeface="Calibri"/>
               </a:rPr>
-              <a:t>covariate shift</a:t>
+              <a:t>shift · drift</a:t>
             </a:r>
           </a:p>
         </p:txBody>
@@ -3411,7 +3411,7 @@
                 </a:solidFill>
                 <a:latin typeface="Calibri"/>
               </a:rPr>
-              <a:t>conditional relation</a:t>
+              <a:t>relation X → Y</a:t>
             </a:r>
           </a:p>
           <a:p>
@@ -3423,7 +3423,7 @@
                 </a:solidFill>
                 <a:latin typeface="Calibri"/>
               </a:rPr>
-              <a:t>concept drift</a:t>
+              <a:t>shift · drift</a:t>
             </a:r>
           </a:p>
         </p:txBody>
@@ -3500,7 +3500,7 @@
                 </a:solidFill>
                 <a:latin typeface="Calibri"/>
               </a:rPr>
-              <a:t>prior shift</a:t>
+              <a:t>shift · drift</a:t>
             </a:r>
           </a:p>
         </p:txBody>
@@ -3607,7 +3607,25 @@
                 </a:solidFill>
                 <a:latin typeface="Calibri"/>
               </a:rPr>
-              <a:t>Model estimator: orthogonal axis, how P(Y|X) is estimated</a:t>
+              <a:t>Estimation error: P(Y|X)</a:t>
+            </a:r>
+            <a:r>
+              <a:rPr sz="1400" b="0" baseline="-25000">
+                <a:solidFill>
+                  <a:srgbClr val="6A4C93"/>
+                </a:solidFill>
+                <a:latin typeface="Calibri"/>
+              </a:rPr>
+              <a:t>model</a:t>
+            </a:r>
+            <a:r>
+              <a:rPr sz="1400" b="0">
+                <a:solidFill>
+                  <a:srgbClr val="6A4C93"/>
+                </a:solidFill>
+                <a:latin typeface="Calibri"/>
+              </a:rPr>
+              <a:t> departs from the true P(Y|X), set at training</a:t>
             </a:r>
           </a:p>
         </p:txBody>
@@ -3714,7 +3732,7 @@
                 </a:solidFill>
                 <a:latin typeface="Calibri"/>
               </a:rPr>
-              <a:t>Manufacturing is X → Y</a:t>
+              <a:t>Change mode</a:t>
             </a:r>
           </a:p>
           <a:p>
@@ -3722,11 +3740,23 @@
             <a:r>
               <a:rPr sz="1700" b="0">
                 <a:solidFill>
-                  <a:srgbClr val="555B66"/>
-                </a:solidFill>
-                <a:latin typeface="Calibri"/>
-              </a:rPr>
-              <a:t>A shift in P(Y) is mostly the result of a change in P(X) or P(Y|X).</a:t>
+                  <a:srgbClr val="1F2A44"/>
+                </a:solidFill>
+                <a:latin typeface="Calibri"/>
+              </a:rPr>
+              <a:t>Shift: changes at once</a:t>
+            </a:r>
+          </a:p>
+          <a:p>
+            <a:pPr algn="l"/>
+            <a:r>
+              <a:rPr sz="1700" b="0">
+                <a:solidFill>
+                  <a:srgbClr val="1F2A44"/>
+                </a:solidFill>
+                <a:latin typeface="Calibri"/>
+              </a:rPr>
+              <a:t>Drift: changes gradually</a:t>
             </a:r>
           </a:p>
         </p:txBody>
@@ -4418,67 +4448,67 @@
           <a:p>
             <a:pPr algn="ctr"/>
             <a:r>
-              <a:rPr sz="1700" b="0">
+              <a:rPr sz="1600" b="1">
                 <a:solidFill>
                   <a:srgbClr val="1F2A44"/>
                 </a:solidFill>
                 <a:latin typeface="Calibri"/>
               </a:rPr>
-              <a:t>Eq. holds only if </a:t>
-            </a:r>
-            <a:r>
-              <a:rPr sz="1700" b="1">
+              <a:t>Error = </a:t>
+            </a:r>
+            <a:r>
+              <a:rPr sz="1600" b="1">
+                <a:solidFill>
+                  <a:srgbClr val="C55A11"/>
+                </a:solidFill>
+                <a:latin typeface="Calibri"/>
+              </a:rPr>
+              <a:t>estimation error</a:t>
+            </a:r>
+            <a:r>
+              <a:rPr sz="1600" b="0">
                 <a:solidFill>
                   <a:srgbClr val="1F2A44"/>
                 </a:solidFill>
                 <a:latin typeface="Calibri"/>
               </a:rPr>
-              <a:t>X</a:t>
-            </a:r>
-            <a:r>
-              <a:rPr sz="1700" b="1" baseline="-25000">
+              <a:t> (model vs true at training)  +  </a:t>
+            </a:r>
+            <a:r>
+              <a:rPr sz="1600" b="1">
+                <a:solidFill>
+                  <a:srgbClr val="C55A11"/>
+                </a:solidFill>
+                <a:latin typeface="Calibri"/>
+              </a:rPr>
+              <a:t>relation change</a:t>
+            </a:r>
+            <a:r>
+              <a:rPr sz="1600" b="0">
                 <a:solidFill>
                   <a:srgbClr val="1F2A44"/>
                 </a:solidFill>
                 <a:latin typeface="Calibri"/>
               </a:rPr>
+              <a:t> (true at training vs now),  weighted by P(X</a:t>
+            </a:r>
+            <a:r>
+              <a:rPr sz="1600" b="0" baseline="-25000">
+                <a:solidFill>
+                  <a:srgbClr val="1F2A44"/>
+                </a:solidFill>
+                <a:latin typeface="Calibri"/>
+              </a:rPr>
               <a:t>o</a:t>
             </a:r>
             <a:r>
-              <a:rPr sz="1700" b="0">
+              <a:rPr sz="1600" b="0">
                 <a:solidFill>
                   <a:srgbClr val="1F2A44"/>
                 </a:solidFill>
                 <a:latin typeface="Calibri"/>
               </a:rPr>
-              <a:t> stays within the range of </a:t>
-            </a:r>
-            <a:r>
-              <a:rPr sz="1700" b="1">
-                <a:solidFill>
-                  <a:srgbClr val="1F2A44"/>
-                </a:solidFill>
-                <a:latin typeface="Calibri"/>
-              </a:rPr>
-              <a:t>X</a:t>
-            </a:r>
-            <a:r>
-              <a:rPr sz="1700" b="1" baseline="-25000">
-                <a:solidFill>
-                  <a:srgbClr val="1F2A44"/>
-                </a:solidFill>
-                <a:latin typeface="Calibri"/>
-              </a:rPr>
-              <a:t>i</a:t>
-            </a:r>
-            <a:r>
-              <a:rPr sz="1700" b="0">
-                <a:solidFill>
-                  <a:srgbClr val="1F2A44"/>
-                </a:solidFill>
-                <a:latin typeface="Calibri"/>
-              </a:rPr>
-              <a:t> and the true P(Y|X) does not change after training.</a:t>
+              <a:t>)</a:t>
             </a:r>
           </a:p>
         </p:txBody>
@@ -4531,7 +4561,7 @@
                 </a:solidFill>
                 <a:latin typeface="Calibri"/>
               </a:rPr>
-              <a:t>Four Axes: Detect, Respond, Validate</a:t>
+              <a:t>Six Cells and Estimation Error</a:t>
             </a:r>
           </a:p>
         </p:txBody>
@@ -4566,7 +4596,7 @@
                 </a:solidFill>
                 <a:latin typeface="Calibri"/>
               </a:rPr>
-              <a:t>Observation pins down when a change happened; levers fit the model while assuming a change</a:t>
+              <a:t>Shift: compare two sets  ·  Drift: track per time window</a:t>
             </a:r>
           </a:p>
         </p:txBody>
@@ -4728,7 +4758,7 @@
                 </a:solidFill>
                 <a:latin typeface="Calibri"/>
               </a:rPr>
-              <a:t>P(X)  Covariate shift</a:t>
+              <a:t>P(X)  shift · drift</a:t>
             </a:r>
           </a:p>
           <a:p>
@@ -4744,7 +4774,7 @@
                 </a:solidFill>
                 <a:latin typeface="Calibri"/>
               </a:rPr>
-              <a:t>Detect: </a:t>
+              <a:t>Shift: </a:t>
             </a:r>
             <a:r>
               <a:rPr sz="1500" b="0">
@@ -4753,7 +4783,7 @@
                 </a:solidFill>
                 <a:latin typeface="Calibri"/>
               </a:rPr>
-              <a:t>PSI·KS·KL; MMD, domain classifier, Hotelling T²·SPE, autoencoder error</a:t>
+              <a:t>PSI·KS, MMD, domain classifier</a:t>
             </a:r>
           </a:p>
           <a:p>
@@ -4769,7 +4799,7 @@
                 </a:solidFill>
                 <a:latin typeface="Calibri"/>
               </a:rPr>
-              <a:t>Respond: </a:t>
+              <a:t>Drift: </a:t>
             </a:r>
             <a:r>
               <a:rPr sz="1500" b="0">
@@ -4778,7 +4808,7 @@
                 </a:solidFill>
                 <a:latin typeface="Calibri"/>
               </a:rPr>
-              <a:t>Importance weighting, domain adaptation, metrology sampling plan</a:t>
+              <a:t>T²·SPE control chart, windowed PSI</a:t>
             </a:r>
           </a:p>
           <a:p>
@@ -4794,7 +4824,7 @@
                 </a:solidFill>
                 <a:latin typeface="Calibri"/>
               </a:rPr>
-              <a:t>Validate: </a:t>
+              <a:t>Respond: </a:t>
             </a:r>
             <a:r>
               <a:rPr sz="1500" b="0">
@@ -4803,7 +4833,7 @@
                 </a:solidFill>
                 <a:latin typeface="Calibri"/>
               </a:rPr>
-              <a:t>Adversarial validation</a:t>
+              <a:t>importance weighting, domain adaptation; recent-window retraining</a:t>
             </a:r>
           </a:p>
         </p:txBody>
@@ -4930,7 +4960,7 @@
                 </a:solidFill>
                 <a:latin typeface="Calibri"/>
               </a:rPr>
-              <a:t>P(Y)  Prior shift</a:t>
+              <a:t>P(Y)  shift · drift</a:t>
             </a:r>
           </a:p>
           <a:p>
@@ -4946,7 +4976,7 @@
                 </a:solidFill>
                 <a:latin typeface="Calibri"/>
               </a:rPr>
-              <a:t>Detect: </a:t>
+              <a:t>Shift: </a:t>
             </a:r>
             <a:r>
               <a:rPr sz="1500" b="0">
@@ -4955,7 +4985,7 @@
                 </a:solidFill>
                 <a:latin typeface="Calibri"/>
               </a:rPr>
-              <a:t>Metrology distribution (KS·PSI), SPC (Shewhart·EWMA), P(Y)pred monitoring</a:t>
+              <a:t>KS·PSI on metrology values, Shewhart chart</a:t>
             </a:r>
           </a:p>
           <a:p>
@@ -4971,7 +5001,7 @@
                 </a:solidFill>
                 <a:latin typeface="Calibri"/>
               </a:rPr>
-              <a:t>Respond: </a:t>
+              <a:t>Drift: </a:t>
             </a:r>
             <a:r>
               <a:rPr sz="1500" b="0">
@@ -4980,7 +5010,7 @@
                 </a:solidFill>
                 <a:latin typeface="Calibri"/>
               </a:rPr>
-              <a:t>Target engineering (log, Box-Cox, spatial decomposition), per-group scaling</a:t>
+              <a:t>EWMA chart, P(Y)pred monitoring</a:t>
             </a:r>
           </a:p>
           <a:p>
@@ -4996,7 +5026,7 @@
                 </a:solidFill>
                 <a:latin typeface="Calibri"/>
               </a:rPr>
-              <a:t>Validate: </a:t>
+              <a:t>Respond: </a:t>
             </a:r>
             <a:r>
               <a:rPr sz="1500" b="0">
@@ -5005,7 +5035,7 @@
                 </a:solidFill>
                 <a:latin typeface="Calibri"/>
               </a:rPr>
-              <a:t>Error per spec and per group</a:t>
+              <a:t>target redefinition; per-group scaling, target engineering</a:t>
             </a:r>
           </a:p>
         </p:txBody>
@@ -5132,7 +5162,7 @@
                 </a:solidFill>
                 <a:latin typeface="Calibri"/>
               </a:rPr>
-              <a:t>P(Y|X)  Concept drift</a:t>
+              <a:t>P(Y|X)  shift · drift</a:t>
             </a:r>
           </a:p>
           <a:p>
@@ -5148,7 +5178,7 @@
                 </a:solidFill>
                 <a:latin typeface="Calibri"/>
               </a:rPr>
-              <a:t>Detect: </a:t>
+              <a:t>Shift: </a:t>
             </a:r>
             <a:r>
               <a:rPr sz="1500" b="0">
@@ -5157,7 +5187,7 @@
                 </a:solidFill>
                 <a:latin typeface="Calibri"/>
               </a:rPr>
-              <a:t>Binning CDT, residual CUSUM, Page-Hinkley, ADWIN, windowed I(Xk;Y)</a:t>
+              <a:t>Binning CDT, event-split comparison</a:t>
             </a:r>
           </a:p>
           <a:p>
@@ -5173,7 +5203,7 @@
                 </a:solidFill>
                 <a:latin typeface="Calibri"/>
               </a:rPr>
-              <a:t>Respond: </a:t>
+              <a:t>Drift: </a:t>
             </a:r>
             <a:r>
               <a:rPr sz="1500" b="0">
@@ -5182,7 +5212,7 @@
                 </a:solidFill>
                 <a:latin typeface="Calibri"/>
               </a:rPr>
-              <a:t>Recent-window retraining, recency weighting, adaptive VM update, Z(t) proxies</a:t>
+              <a:t>residual CUSUM, Page-Hinkley, ADWIN</a:t>
             </a:r>
           </a:p>
           <a:p>
@@ -5198,7 +5228,7 @@
                 </a:solidFill>
                 <a:latin typeface="Calibri"/>
               </a:rPr>
-              <a:t>Validate: </a:t>
+              <a:t>Respond: </a:t>
             </a:r>
             <a:r>
               <a:rPr sz="1500" b="0">
@@ -5207,7 +5237,7 @@
                 </a:solidFill>
                 <a:latin typeface="Calibri"/>
               </a:rPr>
-              <a:t>Temporal CV, lot group split</a:t>
+              <a:t>retrain after event; recency weighting, adaptive VM update</a:t>
             </a:r>
           </a:p>
         </p:txBody>
@@ -5334,7 +5364,7 @@
                 </a:solidFill>
                 <a:latin typeface="Calibri"/>
               </a:rPr>
-              <a:t>Model estimator  (orthogonal)</a:t>
+              <a:t>Estimation error</a:t>
             </a:r>
           </a:p>
           <a:p>
@@ -5359,7 +5389,7 @@
                 </a:solidFill>
                 <a:latin typeface="Calibri"/>
               </a:rPr>
-              <a:t>Train–validation gap; windowed R²·RMSE</a:t>
+              <a:t>train–validation gap, out-of-range check</a:t>
             </a:r>
           </a:p>
           <a:p>
@@ -5384,7 +5414,7 @@
                 </a:solidFill>
                 <a:latin typeface="Calibri"/>
               </a:rPr>
-              <a:t>PLS·ridge·lasso, tree ensembles, GP·conformal, physics hybrid, Optuna</a:t>
+              <a:t>PLS·ridge·lasso, tree ensembles, GP·conformal</a:t>
             </a:r>
           </a:p>
           <a:p>
@@ -5409,7 +5439,7 @@
                 </a:solidFill>
                 <a:latin typeface="Calibri"/>
               </a:rPr>
-              <a:t>Lot group split + temporal CV; R², RMSE, interval coverage</a:t>
+              <a:t>lot group split + temporal CV</a:t>
             </a:r>
           </a:p>
         </p:txBody>
